--- a/Store Support/Projects/VET_Dashboard/reports/Dallas_Team_Report_WK12.pptx
+++ b/Store Support/Projects/VET_Dashboard/reports/Dallas_Team_Report_WK12.pptx
@@ -11,6 +11,9 @@
     <p:sldId id="259" r:id="rId10"/>
     <p:sldId id="260" r:id="rId11"/>
     <p:sldId id="261" r:id="rId12"/>
+    <p:sldId id="262" r:id="rId13"/>
+    <p:sldId id="263" r:id="rId14"/>
+    <p:sldId id="264" r:id="rId15"/>
   </p:sldIdLst>
   <p:sldSz cx="8778240" cy="6583680" type="screen4x3"/>
   <p:notesSz cx="6858000" cy="9144000"/>
@@ -3086,6 +3089,14 @@
 <file path=ppt/slides/slide1.xml><?xml version="1.0" encoding="utf-8"?>
 <p:sld xmlns:a="http://schemas.openxmlformats.org/drawingml/2006/main" xmlns:p="http://schemas.openxmlformats.org/presentationml/2006/main" xmlns:r="http://schemas.openxmlformats.org/officeDocument/2006/relationships">
   <p:cSld>
+    <p:bg>
+      <p:bgPr>
+        <a:solidFill>
+          <a:srgbClr val="1E3A8A"/>
+        </a:solidFill>
+        <a:effectLst/>
+      </p:bgPr>
+    </p:bg>
     <p:spTree>
       <p:nvGrpSpPr>
         <p:cNvPr id="1" name=""/>
@@ -3093,30 +3104,117 @@
         <p:nvPr/>
       </p:nvGrpSpPr>
       <p:grpSpPr/>
-      <p:pic>
-        <p:nvPicPr>
-          <p:cNvPr id="2" name="Picture 1" descr="image.png"/>
-          <p:cNvPicPr>
-            <a:picLocks noChangeAspect="1"/>
-          </p:cNvPicPr>
+      <p:sp>
+        <p:nvSpPr>
+          <p:cNvPr id="2" name="TextBox 1"/>
+          <p:cNvSpPr txBox="1"/>
           <p:nvPr/>
-        </p:nvPicPr>
-        <p:blipFill>
-          <a:blip r:embed="rId2"/>
-          <a:stretch>
-            <a:fillRect/>
-          </a:stretch>
-        </p:blipFill>
+        </p:nvSpPr>
         <p:spPr>
           <a:xfrm>
-            <a:off x="0" y="0"/>
-            <a:ext cx="8778240" cy="4731237"/>
+            <a:off x="457200" y="2286000"/>
+            <a:ext cx="7863840" cy="1645920"/>
           </a:xfrm>
           <a:prstGeom prst="rect">
             <a:avLst/>
           </a:prstGeom>
+          <a:noFill/>
         </p:spPr>
-      </p:pic>
+        <p:txBody>
+          <a:bodyPr wrap="none">
+            <a:spAutoFit/>
+          </a:bodyPr>
+          <a:lstStyle/>
+          <a:p>
+            <a:pPr algn="ctr"/>
+            <a:r>
+              <a:rPr sz="4400" b="1">
+                <a:solidFill>
+                  <a:srgbClr val="FFFFFF"/>
+                </a:solidFill>
+              </a:rPr>
+              <a:t>Dallas Team Report</a:t>
+            </a:r>
+          </a:p>
+        </p:txBody>
+      </p:sp>
+      <p:sp>
+        <p:nvSpPr>
+          <p:cNvPr id="3" name="TextBox 2"/>
+          <p:cNvSpPr txBox="1"/>
+          <p:nvPr/>
+        </p:nvSpPr>
+        <p:spPr>
+          <a:xfrm>
+            <a:off x="457200" y="3840480"/>
+            <a:ext cx="7863840" cy="731520"/>
+          </a:xfrm>
+          <a:prstGeom prst="rect">
+            <a:avLst/>
+          </a:prstGeom>
+          <a:noFill/>
+        </p:spPr>
+        <p:txBody>
+          <a:bodyPr wrap="none">
+            <a:spAutoFit/>
+          </a:bodyPr>
+          <a:lstStyle/>
+          <a:p>
+            <a:pPr algn="ctr"/>
+            <a:r>
+              <a:rPr sz="2000">
+                <a:solidFill>
+                  <a:srgbClr val="FFFFFF"/>
+                </a:solidFill>
+              </a:rPr>
+              <a:t>Walmart Enterprise Transformation</a:t>
+            </a:r>
+          </a:p>
+        </p:txBody>
+      </p:sp>
+      <p:sp>
+        <p:nvSpPr>
+          <p:cNvPr id="4" name="Rectangle 3"/>
+          <p:cNvSpPr/>
+          <p:nvPr/>
+        </p:nvSpPr>
+        <p:spPr>
+          <a:xfrm>
+            <a:off x="0" y="6126480"/>
+            <a:ext cx="8778240" cy="457200"/>
+          </a:xfrm>
+          <a:prstGeom prst="rect">
+            <a:avLst/>
+          </a:prstGeom>
+          <a:solidFill>
+            <a:srgbClr val="FFC220"/>
+          </a:solidFill>
+          <a:ln>
+            <a:noFill/>
+          </a:ln>
+        </p:spPr>
+        <p:style>
+          <a:lnRef idx="1">
+            <a:schemeClr val="accent1"/>
+          </a:lnRef>
+          <a:fillRef idx="3">
+            <a:schemeClr val="accent1"/>
+          </a:fillRef>
+          <a:effectRef idx="2">
+            <a:schemeClr val="accent1"/>
+          </a:effectRef>
+          <a:fontRef idx="minor">
+            <a:schemeClr val="lt1"/>
+          </a:fontRef>
+        </p:style>
+        <p:txBody>
+          <a:bodyPr rtlCol="0" anchor="ctr"/>
+          <a:lstStyle/>
+          <a:p>
+            <a:pPr algn="ctr"/>
+          </a:p>
+        </p:txBody>
+      </p:sp>
     </p:spTree>
   </p:cSld>
   <p:clrMapOvr>
@@ -3137,7 +3235,7 @@
       <p:grpSpPr/>
       <p:pic>
         <p:nvPicPr>
-          <p:cNvPr id="2" name="Picture 1" descr="image.png"/>
+          <p:cNvPr id="2" name="Picture 1" descr="image.jpg"/>
           <p:cNvPicPr>
             <a:picLocks noChangeAspect="1"/>
           </p:cNvPicPr>
@@ -3152,7 +3250,7 @@
         <p:spPr>
           <a:xfrm>
             <a:off x="0" y="0"/>
-            <a:ext cx="8778240" cy="4866579"/>
+            <a:ext cx="8778240" cy="3979096"/>
           </a:xfrm>
           <a:prstGeom prst="rect">
             <a:avLst/>
@@ -3179,7 +3277,91 @@
       <p:grpSpPr/>
       <p:pic>
         <p:nvPicPr>
-          <p:cNvPr id="2" name="Picture 1" descr="image.png"/>
+          <p:cNvPr id="2" name="Picture 1" descr="image.jpg"/>
+          <p:cNvPicPr>
+            <a:picLocks noChangeAspect="1"/>
+          </p:cNvPicPr>
+          <p:nvPr/>
+        </p:nvPicPr>
+        <p:blipFill>
+          <a:blip r:embed="rId2"/>
+          <a:stretch>
+            <a:fillRect/>
+          </a:stretch>
+        </p:blipFill>
+        <p:spPr>
+          <a:xfrm>
+            <a:off x="0" y="0"/>
+            <a:ext cx="8778240" cy="3457247"/>
+          </a:xfrm>
+          <a:prstGeom prst="rect">
+            <a:avLst/>
+          </a:prstGeom>
+        </p:spPr>
+      </p:pic>
+    </p:spTree>
+  </p:cSld>
+  <p:clrMapOvr>
+    <a:masterClrMapping/>
+  </p:clrMapOvr>
+</p:sld>
+</file>
+
+<file path=ppt/slides/slide4.xml><?xml version="1.0" encoding="utf-8"?>
+<p:sld xmlns:a="http://schemas.openxmlformats.org/drawingml/2006/main" xmlns:p="http://schemas.openxmlformats.org/presentationml/2006/main" xmlns:r="http://schemas.openxmlformats.org/officeDocument/2006/relationships">
+  <p:cSld>
+    <p:spTree>
+      <p:nvGrpSpPr>
+        <p:cNvPr id="1" name=""/>
+        <p:cNvGrpSpPr/>
+        <p:nvPr/>
+      </p:nvGrpSpPr>
+      <p:grpSpPr/>
+      <p:pic>
+        <p:nvPicPr>
+          <p:cNvPr id="2" name="Picture 1" descr="image.jpg"/>
+          <p:cNvPicPr>
+            <a:picLocks noChangeAspect="1"/>
+          </p:cNvPicPr>
+          <p:nvPr/>
+        </p:nvPicPr>
+        <p:blipFill>
+          <a:blip r:embed="rId2"/>
+          <a:stretch>
+            <a:fillRect/>
+          </a:stretch>
+        </p:blipFill>
+        <p:spPr>
+          <a:xfrm>
+            <a:off x="0" y="0"/>
+            <a:ext cx="8778240" cy="6033875"/>
+          </a:xfrm>
+          <a:prstGeom prst="rect">
+            <a:avLst/>
+          </a:prstGeom>
+        </p:spPr>
+      </p:pic>
+    </p:spTree>
+  </p:cSld>
+  <p:clrMapOvr>
+    <a:masterClrMapping/>
+  </p:clrMapOvr>
+</p:sld>
+</file>
+
+<file path=ppt/slides/slide5.xml><?xml version="1.0" encoding="utf-8"?>
+<p:sld xmlns:a="http://schemas.openxmlformats.org/drawingml/2006/main" xmlns:p="http://schemas.openxmlformats.org/presentationml/2006/main" xmlns:r="http://schemas.openxmlformats.org/officeDocument/2006/relationships">
+  <p:cSld>
+    <p:spTree>
+      <p:nvGrpSpPr>
+        <p:cNvPr id="1" name=""/>
+        <p:cNvGrpSpPr/>
+        <p:nvPr/>
+      </p:nvGrpSpPr>
+      <p:grpSpPr/>
+      <p:pic>
+        <p:nvPicPr>
+          <p:cNvPr id="2" name="Picture 1" descr="image.jpg"/>
           <p:cNvPicPr>
             <a:picLocks noChangeAspect="1"/>
           </p:cNvPicPr>
@@ -3209,7 +3391,7 @@
 </p:sld>
 </file>
 
-<file path=ppt/slides/slide4.xml><?xml version="1.0" encoding="utf-8"?>
+<file path=ppt/slides/slide6.xml><?xml version="1.0" encoding="utf-8"?>
 <p:sld xmlns:a="http://schemas.openxmlformats.org/drawingml/2006/main" xmlns:p="http://schemas.openxmlformats.org/presentationml/2006/main" xmlns:r="http://schemas.openxmlformats.org/officeDocument/2006/relationships">
   <p:cSld>
     <p:spTree>
@@ -3221,7 +3403,7 @@
       <p:grpSpPr/>
       <p:pic>
         <p:nvPicPr>
-          <p:cNvPr id="2" name="Picture 1" descr="image.png"/>
+          <p:cNvPr id="2" name="Picture 1" descr="image.jpg"/>
           <p:cNvPicPr>
             <a:picLocks noChangeAspect="1"/>
           </p:cNvPicPr>
@@ -3251,7 +3433,7 @@
 </p:sld>
 </file>
 
-<file path=ppt/slides/slide5.xml><?xml version="1.0" encoding="utf-8"?>
+<file path=ppt/slides/slide7.xml><?xml version="1.0" encoding="utf-8"?>
 <p:sld xmlns:a="http://schemas.openxmlformats.org/drawingml/2006/main" xmlns:p="http://schemas.openxmlformats.org/presentationml/2006/main" xmlns:r="http://schemas.openxmlformats.org/officeDocument/2006/relationships">
   <p:cSld>
     <p:spTree>
@@ -3263,7 +3445,7 @@
       <p:grpSpPr/>
       <p:pic>
         <p:nvPicPr>
-          <p:cNvPr id="2" name="Picture 1" descr="image.png"/>
+          <p:cNvPr id="2" name="Picture 1" descr="image.jpg"/>
           <p:cNvPicPr>
             <a:picLocks noChangeAspect="1"/>
           </p:cNvPicPr>
@@ -3278,7 +3460,7 @@
         <p:spPr>
           <a:xfrm>
             <a:off x="0" y="0"/>
-            <a:ext cx="8778240" cy="4310273"/>
+            <a:ext cx="8778240" cy="6583680"/>
           </a:xfrm>
           <a:prstGeom prst="rect">
             <a:avLst/>
@@ -3293,7 +3475,7 @@
 </p:sld>
 </file>
 
-<file path=ppt/slides/slide6.xml><?xml version="1.0" encoding="utf-8"?>
+<file path=ppt/slides/slide8.xml><?xml version="1.0" encoding="utf-8"?>
 <p:sld xmlns:a="http://schemas.openxmlformats.org/drawingml/2006/main" xmlns:p="http://schemas.openxmlformats.org/presentationml/2006/main" xmlns:r="http://schemas.openxmlformats.org/officeDocument/2006/relationships">
   <p:cSld>
     <p:spTree>
@@ -3305,7 +3487,7 @@
       <p:grpSpPr/>
       <p:pic>
         <p:nvPicPr>
-          <p:cNvPr id="2" name="Picture 1" descr="image.png"/>
+          <p:cNvPr id="2" name="Picture 1" descr="image.jpg"/>
           <p:cNvPicPr>
             <a:picLocks noChangeAspect="1"/>
           </p:cNvPicPr>
@@ -3320,7 +3502,49 @@
         <p:spPr>
           <a:xfrm>
             <a:off x="0" y="0"/>
-            <a:ext cx="8778240" cy="1603211"/>
+            <a:ext cx="8778240" cy="6583680"/>
+          </a:xfrm>
+          <a:prstGeom prst="rect">
+            <a:avLst/>
+          </a:prstGeom>
+        </p:spPr>
+      </p:pic>
+    </p:spTree>
+  </p:cSld>
+  <p:clrMapOvr>
+    <a:masterClrMapping/>
+  </p:clrMapOvr>
+</p:sld>
+</file>
+
+<file path=ppt/slides/slide9.xml><?xml version="1.0" encoding="utf-8"?>
+<p:sld xmlns:a="http://schemas.openxmlformats.org/drawingml/2006/main" xmlns:p="http://schemas.openxmlformats.org/presentationml/2006/main" xmlns:r="http://schemas.openxmlformats.org/officeDocument/2006/relationships">
+  <p:cSld>
+    <p:spTree>
+      <p:nvGrpSpPr>
+        <p:cNvPr id="1" name=""/>
+        <p:cNvGrpSpPr/>
+        <p:nvPr/>
+      </p:nvGrpSpPr>
+      <p:grpSpPr/>
+      <p:pic>
+        <p:nvPicPr>
+          <p:cNvPr id="2" name="Picture 1" descr="image.jpg"/>
+          <p:cNvPicPr>
+            <a:picLocks noChangeAspect="1"/>
+          </p:cNvPicPr>
+          <p:nvPr/>
+        </p:nvPicPr>
+        <p:blipFill>
+          <a:blip r:embed="rId2"/>
+          <a:stretch>
+            <a:fillRect/>
+          </a:stretch>
+        </p:blipFill>
+        <p:spPr>
+          <a:xfrm>
+            <a:off x="0" y="0"/>
+            <a:ext cx="8778240" cy="2940058"/>
           </a:xfrm>
           <a:prstGeom prst="rect">
             <a:avLst/>

--- a/Store Support/Projects/VET_Dashboard/reports/Dallas_Team_Report_WK12.pptx
+++ b/Store Support/Projects/VET_Dashboard/reports/Dallas_Team_Report_WK12.pptx
@@ -14,6 +14,10 @@
     <p:sldId id="262" r:id="rId13"/>
     <p:sldId id="263" r:id="rId14"/>
     <p:sldId id="264" r:id="rId15"/>
+    <p:sldId id="265" r:id="rId16"/>
+    <p:sldId id="266" r:id="rId17"/>
+    <p:sldId id="267" r:id="rId18"/>
+    <p:sldId id="268" r:id="rId19"/>
   </p:sldIdLst>
   <p:sldSz cx="8778240" cy="6583680" type="screen4x3"/>
   <p:notesSz cx="6858000" cy="9144000"/>
@@ -3104,9 +3108,33 @@
         <p:nvPr/>
       </p:nvGrpSpPr>
       <p:grpSpPr/>
-      <p:sp>
-        <p:nvSpPr>
-          <p:cNvPr id="2" name="TextBox 1"/>
+      <p:pic>
+        <p:nvPicPr>
+          <p:cNvPr id="2" name="Picture 1" descr="Spark_Blank.png"/>
+          <p:cNvPicPr>
+            <a:picLocks noChangeAspect="1"/>
+          </p:cNvPicPr>
+          <p:nvPr/>
+        </p:nvPicPr>
+        <p:blipFill>
+          <a:blip r:embed="rId2"/>
+          <a:stretch>
+            <a:fillRect/>
+          </a:stretch>
+        </p:blipFill>
+        <p:spPr>
+          <a:xfrm>
+            <a:off x="3474720" y="731520"/>
+            <a:ext cx="1828800" cy="1828800"/>
+          </a:xfrm>
+          <a:prstGeom prst="rect">
+            <a:avLst/>
+          </a:prstGeom>
+        </p:spPr>
+      </p:pic>
+      <p:sp>
+        <p:nvSpPr>
+          <p:cNvPr id="3" name="TextBox 2"/>
           <p:cNvSpPr txBox="1"/>
           <p:nvPr/>
         </p:nvSpPr>
@@ -3140,7 +3168,7 @@
       </p:sp>
       <p:sp>
         <p:nvSpPr>
-          <p:cNvPr id="3" name="TextBox 2"/>
+          <p:cNvPr id="4" name="TextBox 3"/>
           <p:cNvSpPr txBox="1"/>
           <p:nvPr/>
         </p:nvSpPr>
@@ -3174,7 +3202,7 @@
       </p:sp>
       <p:sp>
         <p:nvSpPr>
-          <p:cNvPr id="4" name="Rectangle 3"/>
+          <p:cNvPr id="5" name="Rectangle 4"/>
           <p:cNvSpPr/>
           <p:nvPr/>
         </p:nvSpPr>
@@ -3215,6 +3243,174 @@
           </a:p>
         </p:txBody>
       </p:sp>
+    </p:spTree>
+  </p:cSld>
+  <p:clrMapOvr>
+    <a:masterClrMapping/>
+  </p:clrMapOvr>
+</p:sld>
+</file>
+
+<file path=ppt/slides/slide10.xml><?xml version="1.0" encoding="utf-8"?>
+<p:sld xmlns:a="http://schemas.openxmlformats.org/drawingml/2006/main" xmlns:p="http://schemas.openxmlformats.org/presentationml/2006/main" xmlns:r="http://schemas.openxmlformats.org/officeDocument/2006/relationships">
+  <p:cSld>
+    <p:spTree>
+      <p:nvGrpSpPr>
+        <p:cNvPr id="1" name=""/>
+        <p:cNvGrpSpPr/>
+        <p:nvPr/>
+      </p:nvGrpSpPr>
+      <p:grpSpPr/>
+      <p:pic>
+        <p:nvPicPr>
+          <p:cNvPr id="2" name="Picture 1" descr="image.jpg"/>
+          <p:cNvPicPr>
+            <a:picLocks noChangeAspect="1"/>
+          </p:cNvPicPr>
+          <p:nvPr/>
+        </p:nvPicPr>
+        <p:blipFill>
+          <a:blip r:embed="rId2"/>
+          <a:stretch>
+            <a:fillRect/>
+          </a:stretch>
+        </p:blipFill>
+        <p:spPr>
+          <a:xfrm>
+            <a:off x="0" y="0"/>
+            <a:ext cx="8778240" cy="6583680"/>
+          </a:xfrm>
+          <a:prstGeom prst="rect">
+            <a:avLst/>
+          </a:prstGeom>
+        </p:spPr>
+      </p:pic>
+    </p:spTree>
+  </p:cSld>
+  <p:clrMapOvr>
+    <a:masterClrMapping/>
+  </p:clrMapOvr>
+</p:sld>
+</file>
+
+<file path=ppt/slides/slide11.xml><?xml version="1.0" encoding="utf-8"?>
+<p:sld xmlns:a="http://schemas.openxmlformats.org/drawingml/2006/main" xmlns:p="http://schemas.openxmlformats.org/presentationml/2006/main" xmlns:r="http://schemas.openxmlformats.org/officeDocument/2006/relationships">
+  <p:cSld>
+    <p:spTree>
+      <p:nvGrpSpPr>
+        <p:cNvPr id="1" name=""/>
+        <p:cNvGrpSpPr/>
+        <p:nvPr/>
+      </p:nvGrpSpPr>
+      <p:grpSpPr/>
+      <p:pic>
+        <p:nvPicPr>
+          <p:cNvPr id="2" name="Picture 1" descr="image.jpg"/>
+          <p:cNvPicPr>
+            <a:picLocks noChangeAspect="1"/>
+          </p:cNvPicPr>
+          <p:nvPr/>
+        </p:nvPicPr>
+        <p:blipFill>
+          <a:blip r:embed="rId2"/>
+          <a:stretch>
+            <a:fillRect/>
+          </a:stretch>
+        </p:blipFill>
+        <p:spPr>
+          <a:xfrm>
+            <a:off x="0" y="0"/>
+            <a:ext cx="8778240" cy="6583680"/>
+          </a:xfrm>
+          <a:prstGeom prst="rect">
+            <a:avLst/>
+          </a:prstGeom>
+        </p:spPr>
+      </p:pic>
+    </p:spTree>
+  </p:cSld>
+  <p:clrMapOvr>
+    <a:masterClrMapping/>
+  </p:clrMapOvr>
+</p:sld>
+</file>
+
+<file path=ppt/slides/slide12.xml><?xml version="1.0" encoding="utf-8"?>
+<p:sld xmlns:a="http://schemas.openxmlformats.org/drawingml/2006/main" xmlns:p="http://schemas.openxmlformats.org/presentationml/2006/main" xmlns:r="http://schemas.openxmlformats.org/officeDocument/2006/relationships">
+  <p:cSld>
+    <p:spTree>
+      <p:nvGrpSpPr>
+        <p:cNvPr id="1" name=""/>
+        <p:cNvGrpSpPr/>
+        <p:nvPr/>
+      </p:nvGrpSpPr>
+      <p:grpSpPr/>
+      <p:pic>
+        <p:nvPicPr>
+          <p:cNvPr id="2" name="Picture 1" descr="image.jpg"/>
+          <p:cNvPicPr>
+            <a:picLocks noChangeAspect="1"/>
+          </p:cNvPicPr>
+          <p:nvPr/>
+        </p:nvPicPr>
+        <p:blipFill>
+          <a:blip r:embed="rId2"/>
+          <a:stretch>
+            <a:fillRect/>
+          </a:stretch>
+        </p:blipFill>
+        <p:spPr>
+          <a:xfrm>
+            <a:off x="0" y="0"/>
+            <a:ext cx="8778240" cy="5316333"/>
+          </a:xfrm>
+          <a:prstGeom prst="rect">
+            <a:avLst/>
+          </a:prstGeom>
+        </p:spPr>
+      </p:pic>
+    </p:spTree>
+  </p:cSld>
+  <p:clrMapOvr>
+    <a:masterClrMapping/>
+  </p:clrMapOvr>
+</p:sld>
+</file>
+
+<file path=ppt/slides/slide13.xml><?xml version="1.0" encoding="utf-8"?>
+<p:sld xmlns:a="http://schemas.openxmlformats.org/drawingml/2006/main" xmlns:p="http://schemas.openxmlformats.org/presentationml/2006/main" xmlns:r="http://schemas.openxmlformats.org/officeDocument/2006/relationships">
+  <p:cSld>
+    <p:spTree>
+      <p:nvGrpSpPr>
+        <p:cNvPr id="1" name=""/>
+        <p:cNvGrpSpPr/>
+        <p:nvPr/>
+      </p:nvGrpSpPr>
+      <p:grpSpPr/>
+      <p:pic>
+        <p:nvPicPr>
+          <p:cNvPr id="2" name="Picture 1" descr="image.jpg"/>
+          <p:cNvPicPr>
+            <a:picLocks noChangeAspect="1"/>
+          </p:cNvPicPr>
+          <p:nvPr/>
+        </p:nvPicPr>
+        <p:blipFill>
+          <a:blip r:embed="rId2"/>
+          <a:stretch>
+            <a:fillRect/>
+          </a:stretch>
+        </p:blipFill>
+        <p:spPr>
+          <a:xfrm>
+            <a:off x="0" y="0"/>
+            <a:ext cx="8778240" cy="5488729"/>
+          </a:xfrm>
+          <a:prstGeom prst="rect">
+            <a:avLst/>
+          </a:prstGeom>
+        </p:spPr>
+      </p:pic>
     </p:spTree>
   </p:cSld>
   <p:clrMapOvr>
@@ -3250,7 +3446,7 @@
         <p:spPr>
           <a:xfrm>
             <a:off x="0" y="0"/>
-            <a:ext cx="8778240" cy="3979096"/>
+            <a:ext cx="8778240" cy="4118876"/>
           </a:xfrm>
           <a:prstGeom prst="rect">
             <a:avLst/>
@@ -3292,7 +3488,7 @@
         <p:spPr>
           <a:xfrm>
             <a:off x="0" y="0"/>
-            <a:ext cx="8778240" cy="3457247"/>
+            <a:ext cx="8778240" cy="6583680"/>
           </a:xfrm>
           <a:prstGeom prst="rect">
             <a:avLst/>
@@ -3334,7 +3530,7 @@
         <p:spPr>
           <a:xfrm>
             <a:off x="0" y="0"/>
-            <a:ext cx="8778240" cy="6033875"/>
+            <a:ext cx="8778240" cy="6583680"/>
           </a:xfrm>
           <a:prstGeom prst="rect">
             <a:avLst/>
@@ -3376,7 +3572,7 @@
         <p:spPr>
           <a:xfrm>
             <a:off x="0" y="0"/>
-            <a:ext cx="8778240" cy="6583680"/>
+            <a:ext cx="8778240" cy="4566175"/>
           </a:xfrm>
           <a:prstGeom prst="rect">
             <a:avLst/>
@@ -3418,7 +3614,7 @@
         <p:spPr>
           <a:xfrm>
             <a:off x="0" y="0"/>
-            <a:ext cx="8778240" cy="6583680"/>
+            <a:ext cx="8778240" cy="5675104"/>
           </a:xfrm>
           <a:prstGeom prst="rect">
             <a:avLst/>
@@ -3544,7 +3740,7 @@
         <p:spPr>
           <a:xfrm>
             <a:off x="0" y="0"/>
-            <a:ext cx="8778240" cy="2940058"/>
+            <a:ext cx="8778240" cy="6583680"/>
           </a:xfrm>
           <a:prstGeom prst="rect">
             <a:avLst/>

--- a/Store Support/Projects/VET_Dashboard/reports/Dallas_Team_Report_WK12.pptx
+++ b/Store Support/Projects/VET_Dashboard/reports/Dallas_Team_Report_WK12.pptx
@@ -17,7 +17,6 @@
     <p:sldId id="265" r:id="rId16"/>
     <p:sldId id="266" r:id="rId17"/>
     <p:sldId id="267" r:id="rId18"/>
-    <p:sldId id="268" r:id="rId19"/>
   </p:sldIdLst>
   <p:sldSz cx="8778240" cy="6583680" type="screen4x3"/>
   <p:notesSz cx="6858000" cy="9144000"/>
@@ -3278,7 +3277,7 @@
         <p:spPr>
           <a:xfrm>
             <a:off x="0" y="0"/>
-            <a:ext cx="8778240" cy="6583680"/>
+            <a:ext cx="8778240" cy="1048356"/>
           </a:xfrm>
           <a:prstGeom prst="rect">
             <a:avLst/>
@@ -3320,7 +3319,7 @@
         <p:spPr>
           <a:xfrm>
             <a:off x="0" y="0"/>
-            <a:ext cx="8778240" cy="6583680"/>
+            <a:ext cx="8778240" cy="3820677"/>
           </a:xfrm>
           <a:prstGeom prst="rect">
             <a:avLst/>
@@ -3362,49 +3361,7 @@
         <p:spPr>
           <a:xfrm>
             <a:off x="0" y="0"/>
-            <a:ext cx="8778240" cy="5316333"/>
-          </a:xfrm>
-          <a:prstGeom prst="rect">
-            <a:avLst/>
-          </a:prstGeom>
-        </p:spPr>
-      </p:pic>
-    </p:spTree>
-  </p:cSld>
-  <p:clrMapOvr>
-    <a:masterClrMapping/>
-  </p:clrMapOvr>
-</p:sld>
-</file>
-
-<file path=ppt/slides/slide13.xml><?xml version="1.0" encoding="utf-8"?>
-<p:sld xmlns:a="http://schemas.openxmlformats.org/drawingml/2006/main" xmlns:p="http://schemas.openxmlformats.org/presentationml/2006/main" xmlns:r="http://schemas.openxmlformats.org/officeDocument/2006/relationships">
-  <p:cSld>
-    <p:spTree>
-      <p:nvGrpSpPr>
-        <p:cNvPr id="1" name=""/>
-        <p:cNvGrpSpPr/>
-        <p:nvPr/>
-      </p:nvGrpSpPr>
-      <p:grpSpPr/>
-      <p:pic>
-        <p:nvPicPr>
-          <p:cNvPr id="2" name="Picture 1" descr="image.jpg"/>
-          <p:cNvPicPr>
-            <a:picLocks noChangeAspect="1"/>
-          </p:cNvPicPr>
-          <p:nvPr/>
-        </p:nvPicPr>
-        <p:blipFill>
-          <a:blip r:embed="rId2"/>
-          <a:stretch>
-            <a:fillRect/>
-          </a:stretch>
-        </p:blipFill>
-        <p:spPr>
-          <a:xfrm>
-            <a:off x="0" y="0"/>
-            <a:ext cx="8778240" cy="5488729"/>
+            <a:ext cx="8778240" cy="1444402"/>
           </a:xfrm>
           <a:prstGeom prst="rect">
             <a:avLst/>
@@ -3446,7 +3403,7 @@
         <p:spPr>
           <a:xfrm>
             <a:off x="0" y="0"/>
-            <a:ext cx="8778240" cy="4118876"/>
+            <a:ext cx="8778240" cy="3648281"/>
           </a:xfrm>
           <a:prstGeom prst="rect">
             <a:avLst/>
@@ -3488,7 +3445,7 @@
         <p:spPr>
           <a:xfrm>
             <a:off x="0" y="0"/>
-            <a:ext cx="8778240" cy="6583680"/>
+            <a:ext cx="8778240" cy="3820677"/>
           </a:xfrm>
           <a:prstGeom prst="rect">
             <a:avLst/>
@@ -3530,7 +3487,7 @@
         <p:spPr>
           <a:xfrm>
             <a:off x="0" y="0"/>
-            <a:ext cx="8778240" cy="6583680"/>
+            <a:ext cx="8778240" cy="1048356"/>
           </a:xfrm>
           <a:prstGeom prst="rect">
             <a:avLst/>
@@ -3572,7 +3529,7 @@
         <p:spPr>
           <a:xfrm>
             <a:off x="0" y="0"/>
-            <a:ext cx="8778240" cy="4566175"/>
+            <a:ext cx="8778240" cy="3820677"/>
           </a:xfrm>
           <a:prstGeom prst="rect">
             <a:avLst/>
@@ -3614,7 +3571,7 @@
         <p:spPr>
           <a:xfrm>
             <a:off x="0" y="0"/>
-            <a:ext cx="8778240" cy="5675104"/>
+            <a:ext cx="8778240" cy="1444402"/>
           </a:xfrm>
           <a:prstGeom prst="rect">
             <a:avLst/>
@@ -3656,7 +3613,7 @@
         <p:spPr>
           <a:xfrm>
             <a:off x="0" y="0"/>
-            <a:ext cx="8778240" cy="6583680"/>
+            <a:ext cx="8778240" cy="3820677"/>
           </a:xfrm>
           <a:prstGeom prst="rect">
             <a:avLst/>
@@ -3698,7 +3655,7 @@
         <p:spPr>
           <a:xfrm>
             <a:off x="0" y="0"/>
-            <a:ext cx="8778240" cy="6583680"/>
+            <a:ext cx="8778240" cy="1840448"/>
           </a:xfrm>
           <a:prstGeom prst="rect">
             <a:avLst/>
@@ -3740,7 +3697,7 @@
         <p:spPr>
           <a:xfrm>
             <a:off x="0" y="0"/>
-            <a:ext cx="8778240" cy="6583680"/>
+            <a:ext cx="8778240" cy="3820677"/>
           </a:xfrm>
           <a:prstGeom prst="rect">
             <a:avLst/>
